--- a/assets/courses/ai-augmented-se/FPGAPA_AIAugmentedSE_Course_Overview.pptx
+++ b/assets/courses/ai-augmented-se/FPGAPA_AIAugmentedSE_Course_Overview.pptx
@@ -5483,7 +5483,7 @@
       </p:sp>
       <p:pic>
         <p:nvPicPr>
-          <p:cNvPr id="5" name="Image 0" descr="preencoded.png">    </p:cNvPr>
+          <p:cNvPr id="5" name="Image 0" descr="preencoded.png"/>
           <p:cNvPicPr>
             <a:picLocks noChangeAspect="1"/>
           </p:cNvPicPr>
@@ -5897,7 +5897,7 @@
       </p:sp>
       <p:pic>
         <p:nvPicPr>
-          <p:cNvPr id="5" name="Image 0" descr="preencoded.png">    </p:cNvPr>
+          <p:cNvPr id="5" name="Image 0" descr="preencoded.png"/>
           <p:cNvPicPr>
             <a:picLocks noChangeAspect="1"/>
           </p:cNvPicPr>
@@ -6218,7 +6218,7 @@
       </p:sp>
       <p:pic>
         <p:nvPicPr>
-          <p:cNvPr id="3" name="Image 0" descr="preencoded.png">    </p:cNvPr>
+          <p:cNvPr id="3" name="Image 0" descr="preencoded.png"/>
           <p:cNvPicPr>
             <a:picLocks noChangeAspect="1"/>
           </p:cNvPicPr>
@@ -6404,7 +6404,7 @@
       </p:sp>
       <p:pic>
         <p:nvPicPr>
-          <p:cNvPr id="9" name="Image 1" descr="preencoded.png">    </p:cNvPr>
+          <p:cNvPr id="9" name="Image 1" descr="preencoded.png"/>
           <p:cNvPicPr>
             <a:picLocks noChangeAspect="1"/>
           </p:cNvPicPr>
@@ -6570,7 +6570,7 @@
       </p:sp>
       <p:pic>
         <p:nvPicPr>
-          <p:cNvPr id="14" name="Image 2" descr="preencoded.png">    </p:cNvPr>
+          <p:cNvPr id="14" name="Image 2" descr="preencoded.png"/>
           <p:cNvPicPr>
             <a:picLocks noChangeAspect="1"/>
           </p:cNvPicPr>
@@ -6736,7 +6736,7 @@
       </p:sp>
       <p:pic>
         <p:nvPicPr>
-          <p:cNvPr id="19" name="Image 3" descr="preencoded.png">    </p:cNvPr>
+          <p:cNvPr id="19" name="Image 3" descr="preencoded.png"/>
           <p:cNvPicPr>
             <a:picLocks noChangeAspect="1"/>
           </p:cNvPicPr>
@@ -7051,7 +7051,7 @@
       </p:sp>
       <p:pic>
         <p:nvPicPr>
-          <p:cNvPr id="3" name="Image 0" descr="preencoded.png">    </p:cNvPr>
+          <p:cNvPr id="3" name="Image 0" descr="preencoded.png"/>
           <p:cNvPicPr>
             <a:picLocks noChangeAspect="1"/>
           </p:cNvPicPr>
@@ -7428,7 +7428,7 @@
       </p:sp>
       <p:pic>
         <p:nvPicPr>
-          <p:cNvPr id="12" name="Image 1" descr="preencoded.png">    </p:cNvPr>
+          <p:cNvPr id="12" name="Image 1" descr="preencoded.png"/>
           <p:cNvPicPr>
             <a:picLocks noChangeAspect="1"/>
           </p:cNvPicPr>
@@ -7879,7 +7879,7 @@
       </p:sp>
       <p:pic>
         <p:nvPicPr>
-          <p:cNvPr id="5" name="Image 0" descr="preencoded.png">    </p:cNvPr>
+          <p:cNvPr id="5" name="Image 0" descr="preencoded.png"/>
           <p:cNvPicPr>
             <a:picLocks noChangeAspect="1"/>
           </p:cNvPicPr>
@@ -8200,7 +8200,7 @@
       </p:sp>
       <p:pic>
         <p:nvPicPr>
-          <p:cNvPr id="3" name="Image 0" descr="preencoded.png">    </p:cNvPr>
+          <p:cNvPr id="3" name="Image 0" descr="preencoded.png"/>
           <p:cNvPicPr>
             <a:picLocks noChangeAspect="1"/>
           </p:cNvPicPr>
@@ -8386,7 +8386,7 @@
       </p:sp>
       <p:pic>
         <p:nvPicPr>
-          <p:cNvPr id="9" name="Image 1" descr="preencoded.png">    </p:cNvPr>
+          <p:cNvPr id="9" name="Image 1" descr="preencoded.png"/>
           <p:cNvPicPr>
             <a:picLocks noChangeAspect="1"/>
           </p:cNvPicPr>
@@ -8552,7 +8552,7 @@
       </p:sp>
       <p:pic>
         <p:nvPicPr>
-          <p:cNvPr id="14" name="Image 2" descr="preencoded.png">    </p:cNvPr>
+          <p:cNvPr id="14" name="Image 2" descr="preencoded.png"/>
           <p:cNvPicPr>
             <a:picLocks noChangeAspect="1"/>
           </p:cNvPicPr>
@@ -8718,7 +8718,7 @@
       </p:sp>
       <p:pic>
         <p:nvPicPr>
-          <p:cNvPr id="19" name="Image 3" descr="preencoded.png">    </p:cNvPr>
+          <p:cNvPr id="19" name="Image 3" descr="preencoded.png"/>
           <p:cNvPicPr>
             <a:picLocks noChangeAspect="1"/>
           </p:cNvPicPr>
@@ -9033,7 +9033,7 @@
       </p:sp>
       <p:pic>
         <p:nvPicPr>
-          <p:cNvPr id="3" name="Image 0" descr="preencoded.png">    </p:cNvPr>
+          <p:cNvPr id="3" name="Image 0" descr="preencoded.png"/>
           <p:cNvPicPr>
             <a:picLocks noChangeAspect="1"/>
           </p:cNvPicPr>
@@ -9410,7 +9410,7 @@
       </p:sp>
       <p:pic>
         <p:nvPicPr>
-          <p:cNvPr id="12" name="Image 1" descr="preencoded.png">    </p:cNvPr>
+          <p:cNvPr id="12" name="Image 1" descr="preencoded.png"/>
           <p:cNvPicPr>
             <a:picLocks noChangeAspect="1"/>
           </p:cNvPicPr>
@@ -9861,7 +9861,7 @@
       </p:sp>
       <p:pic>
         <p:nvPicPr>
-          <p:cNvPr id="5" name="Image 0" descr="preencoded.png">    </p:cNvPr>
+          <p:cNvPr id="5" name="Image 0" descr="preencoded.png"/>
           <p:cNvPicPr>
             <a:picLocks noChangeAspect="1"/>
           </p:cNvPicPr>
@@ -10182,7 +10182,7 @@
       </p:sp>
       <p:pic>
         <p:nvPicPr>
-          <p:cNvPr id="3" name="Image 0" descr="preencoded.png">    </p:cNvPr>
+          <p:cNvPr id="3" name="Image 0" descr="preencoded.png"/>
           <p:cNvPicPr>
             <a:picLocks noChangeAspect="1"/>
           </p:cNvPicPr>
@@ -10368,7 +10368,7 @@
       </p:sp>
       <p:pic>
         <p:nvPicPr>
-          <p:cNvPr id="9" name="Image 1" descr="preencoded.png">    </p:cNvPr>
+          <p:cNvPr id="9" name="Image 1" descr="preencoded.png"/>
           <p:cNvPicPr>
             <a:picLocks noChangeAspect="1"/>
           </p:cNvPicPr>
@@ -10534,7 +10534,7 @@
       </p:sp>
       <p:pic>
         <p:nvPicPr>
-          <p:cNvPr id="14" name="Image 2" descr="preencoded.png">    </p:cNvPr>
+          <p:cNvPr id="14" name="Image 2" descr="preencoded.png"/>
           <p:cNvPicPr>
             <a:picLocks noChangeAspect="1"/>
           </p:cNvPicPr>
@@ -10700,7 +10700,7 @@
       </p:sp>
       <p:pic>
         <p:nvPicPr>
-          <p:cNvPr id="19" name="Image 3" descr="preencoded.png">    </p:cNvPr>
+          <p:cNvPr id="19" name="Image 3" descr="preencoded.png"/>
           <p:cNvPicPr>
             <a:picLocks noChangeAspect="1"/>
           </p:cNvPicPr>
@@ -11015,7 +11015,7 @@
       </p:sp>
       <p:pic>
         <p:nvPicPr>
-          <p:cNvPr id="3" name="Image 0" descr="preencoded.png">    </p:cNvPr>
+          <p:cNvPr id="3" name="Image 0" descr="preencoded.png"/>
           <p:cNvPicPr>
             <a:picLocks noChangeAspect="1"/>
           </p:cNvPicPr>
@@ -11392,7 +11392,7 @@
       </p:sp>
       <p:pic>
         <p:nvPicPr>
-          <p:cNvPr id="12" name="Image 1" descr="preencoded.png">    </p:cNvPr>
+          <p:cNvPr id="12" name="Image 1" descr="preencoded.png"/>
           <p:cNvPicPr>
             <a:picLocks noChangeAspect="1"/>
           </p:cNvPicPr>
@@ -11843,7 +11843,7 @@
       </p:sp>
       <p:pic>
         <p:nvPicPr>
-          <p:cNvPr id="5" name="Image 0" descr="preencoded.png">    </p:cNvPr>
+          <p:cNvPr id="5" name="Image 0" descr="preencoded.png"/>
           <p:cNvPicPr>
             <a:picLocks noChangeAspect="1"/>
           </p:cNvPicPr>
@@ -12164,7 +12164,7 @@
       </p:sp>
       <p:pic>
         <p:nvPicPr>
-          <p:cNvPr id="3" name="Image 0" descr="preencoded.png">    </p:cNvPr>
+          <p:cNvPr id="3" name="Image 0" descr="preencoded.png"/>
           <p:cNvPicPr>
             <a:picLocks noChangeAspect="1"/>
           </p:cNvPicPr>
@@ -13082,7 +13082,7 @@
       </p:sp>
       <p:pic>
         <p:nvPicPr>
-          <p:cNvPr id="3" name="Image 0" descr="preencoded.png">    </p:cNvPr>
+          <p:cNvPr id="3" name="Image 0" descr="preencoded.png"/>
           <p:cNvPicPr>
             <a:picLocks noChangeAspect="1"/>
           </p:cNvPicPr>
@@ -13268,7 +13268,7 @@
       </p:sp>
       <p:pic>
         <p:nvPicPr>
-          <p:cNvPr id="9" name="Image 1" descr="preencoded.png">    </p:cNvPr>
+          <p:cNvPr id="9" name="Image 1" descr="preencoded.png"/>
           <p:cNvPicPr>
             <a:picLocks noChangeAspect="1"/>
           </p:cNvPicPr>
@@ -13434,7 +13434,7 @@
       </p:sp>
       <p:pic>
         <p:nvPicPr>
-          <p:cNvPr id="14" name="Image 2" descr="preencoded.png">    </p:cNvPr>
+          <p:cNvPr id="14" name="Image 2" descr="preencoded.png"/>
           <p:cNvPicPr>
             <a:picLocks noChangeAspect="1"/>
           </p:cNvPicPr>
@@ -13600,7 +13600,7 @@
       </p:sp>
       <p:pic>
         <p:nvPicPr>
-          <p:cNvPr id="19" name="Image 3" descr="preencoded.png">    </p:cNvPr>
+          <p:cNvPr id="19" name="Image 3" descr="preencoded.png"/>
           <p:cNvPicPr>
             <a:picLocks noChangeAspect="1"/>
           </p:cNvPicPr>
@@ -13915,7 +13915,7 @@
       </p:sp>
       <p:pic>
         <p:nvPicPr>
-          <p:cNvPr id="3" name="Image 0" descr="preencoded.png">    </p:cNvPr>
+          <p:cNvPr id="3" name="Image 0" descr="preencoded.png"/>
           <p:cNvPicPr>
             <a:picLocks noChangeAspect="1"/>
           </p:cNvPicPr>
@@ -14292,7 +14292,7 @@
       </p:sp>
       <p:pic>
         <p:nvPicPr>
-          <p:cNvPr id="12" name="Image 1" descr="preencoded.png">    </p:cNvPr>
+          <p:cNvPr id="12" name="Image 1" descr="preencoded.png"/>
           <p:cNvPicPr>
             <a:picLocks noChangeAspect="1"/>
           </p:cNvPicPr>
@@ -14743,7 +14743,7 @@
       </p:sp>
       <p:pic>
         <p:nvPicPr>
-          <p:cNvPr id="5" name="Image 0" descr="preencoded.png">    </p:cNvPr>
+          <p:cNvPr id="5" name="Image 0" descr="preencoded.png"/>
           <p:cNvPicPr>
             <a:picLocks noChangeAspect="1"/>
           </p:cNvPicPr>
@@ -15064,7 +15064,7 @@
       </p:sp>
       <p:pic>
         <p:nvPicPr>
-          <p:cNvPr id="3" name="Image 0" descr="preencoded.png">    </p:cNvPr>
+          <p:cNvPr id="3" name="Image 0" descr="preencoded.png"/>
           <p:cNvPicPr>
             <a:picLocks noChangeAspect="1"/>
           </p:cNvPicPr>
@@ -15250,7 +15250,7 @@
       </p:sp>
       <p:pic>
         <p:nvPicPr>
-          <p:cNvPr id="9" name="Image 1" descr="preencoded.png">    </p:cNvPr>
+          <p:cNvPr id="9" name="Image 1" descr="preencoded.png"/>
           <p:cNvPicPr>
             <a:picLocks noChangeAspect="1"/>
           </p:cNvPicPr>
@@ -15416,7 +15416,7 @@
       </p:sp>
       <p:pic>
         <p:nvPicPr>
-          <p:cNvPr id="14" name="Image 2" descr="preencoded.png">    </p:cNvPr>
+          <p:cNvPr id="14" name="Image 2" descr="preencoded.png"/>
           <p:cNvPicPr>
             <a:picLocks noChangeAspect="1"/>
           </p:cNvPicPr>
@@ -15582,7 +15582,7 @@
       </p:sp>
       <p:pic>
         <p:nvPicPr>
-          <p:cNvPr id="19" name="Image 3" descr="preencoded.png">    </p:cNvPr>
+          <p:cNvPr id="19" name="Image 3" descr="preencoded.png"/>
           <p:cNvPicPr>
             <a:picLocks noChangeAspect="1"/>
           </p:cNvPicPr>
@@ -15897,7 +15897,7 @@
       </p:sp>
       <p:pic>
         <p:nvPicPr>
-          <p:cNvPr id="3" name="Image 0" descr="preencoded.png">    </p:cNvPr>
+          <p:cNvPr id="3" name="Image 0" descr="preencoded.png"/>
           <p:cNvPicPr>
             <a:picLocks noChangeAspect="1"/>
           </p:cNvPicPr>
@@ -16274,7 +16274,7 @@
       </p:sp>
       <p:pic>
         <p:nvPicPr>
-          <p:cNvPr id="12" name="Image 1" descr="preencoded.png">    </p:cNvPr>
+          <p:cNvPr id="12" name="Image 1" descr="preencoded.png"/>
           <p:cNvPicPr>
             <a:picLocks noChangeAspect="1"/>
           </p:cNvPicPr>
@@ -16725,7 +16725,7 @@
       </p:sp>
       <p:pic>
         <p:nvPicPr>
-          <p:cNvPr id="5" name="Image 0" descr="preencoded.png">    </p:cNvPr>
+          <p:cNvPr id="5" name="Image 0" descr="preencoded.png"/>
           <p:cNvPicPr>
             <a:picLocks noChangeAspect="1"/>
           </p:cNvPicPr>
@@ -17046,7 +17046,7 @@
       </p:sp>
       <p:pic>
         <p:nvPicPr>
-          <p:cNvPr id="3" name="Image 0" descr="preencoded.png">    </p:cNvPr>
+          <p:cNvPr id="3" name="Image 0" descr="preencoded.png"/>
           <p:cNvPicPr>
             <a:picLocks noChangeAspect="1"/>
           </p:cNvPicPr>
@@ -17232,7 +17232,7 @@
       </p:sp>
       <p:pic>
         <p:nvPicPr>
-          <p:cNvPr id="9" name="Image 1" descr="preencoded.png">    </p:cNvPr>
+          <p:cNvPr id="9" name="Image 1" descr="preencoded.png"/>
           <p:cNvPicPr>
             <a:picLocks noChangeAspect="1"/>
           </p:cNvPicPr>
@@ -17398,7 +17398,7 @@
       </p:sp>
       <p:pic>
         <p:nvPicPr>
-          <p:cNvPr id="14" name="Image 2" descr="preencoded.png">    </p:cNvPr>
+          <p:cNvPr id="14" name="Image 2" descr="preencoded.png"/>
           <p:cNvPicPr>
             <a:picLocks noChangeAspect="1"/>
           </p:cNvPicPr>
@@ -17564,7 +17564,7 @@
       </p:sp>
       <p:pic>
         <p:nvPicPr>
-          <p:cNvPr id="19" name="Image 3" descr="preencoded.png">    </p:cNvPr>
+          <p:cNvPr id="19" name="Image 3" descr="preencoded.png"/>
           <p:cNvPicPr>
             <a:picLocks noChangeAspect="1"/>
           </p:cNvPicPr>
@@ -17879,7 +17879,7 @@
       </p:sp>
       <p:pic>
         <p:nvPicPr>
-          <p:cNvPr id="3" name="Image 0" descr="preencoded.png">    </p:cNvPr>
+          <p:cNvPr id="3" name="Image 0" descr="preencoded.png"/>
           <p:cNvPicPr>
             <a:picLocks noChangeAspect="1"/>
           </p:cNvPicPr>
@@ -18256,7 +18256,7 @@
       </p:sp>
       <p:pic>
         <p:nvPicPr>
-          <p:cNvPr id="12" name="Image 1" descr="preencoded.png">    </p:cNvPr>
+          <p:cNvPr id="12" name="Image 1" descr="preencoded.png"/>
           <p:cNvPicPr>
             <a:picLocks noChangeAspect="1"/>
           </p:cNvPicPr>
@@ -18707,7 +18707,7 @@
       </p:sp>
       <p:pic>
         <p:nvPicPr>
-          <p:cNvPr id="5" name="Image 0" descr="preencoded.png">    </p:cNvPr>
+          <p:cNvPr id="5" name="Image 0" descr="preencoded.png"/>
           <p:cNvPicPr>
             <a:picLocks noChangeAspect="1"/>
           </p:cNvPicPr>
@@ -19028,7 +19028,7 @@
       </p:sp>
       <p:pic>
         <p:nvPicPr>
-          <p:cNvPr id="3" name="Image 0" descr="preencoded.png">    </p:cNvPr>
+          <p:cNvPr id="3" name="Image 0" descr="preencoded.png"/>
           <p:cNvPicPr>
             <a:picLocks noChangeAspect="1"/>
           </p:cNvPicPr>
@@ -19214,7 +19214,7 @@
       </p:sp>
       <p:pic>
         <p:nvPicPr>
-          <p:cNvPr id="9" name="Image 1" descr="preencoded.png">    </p:cNvPr>
+          <p:cNvPr id="9" name="Image 1" descr="preencoded.png"/>
           <p:cNvPicPr>
             <a:picLocks noChangeAspect="1"/>
           </p:cNvPicPr>
@@ -19380,7 +19380,7 @@
       </p:sp>
       <p:pic>
         <p:nvPicPr>
-          <p:cNvPr id="14" name="Image 2" descr="preencoded.png">    </p:cNvPr>
+          <p:cNvPr id="14" name="Image 2" descr="preencoded.png"/>
           <p:cNvPicPr>
             <a:picLocks noChangeAspect="1"/>
           </p:cNvPicPr>
@@ -19546,7 +19546,7 @@
       </p:sp>
       <p:pic>
         <p:nvPicPr>
-          <p:cNvPr id="19" name="Image 3" descr="preencoded.png">    </p:cNvPr>
+          <p:cNvPr id="19" name="Image 3" descr="preencoded.png"/>
           <p:cNvPicPr>
             <a:picLocks noChangeAspect="1"/>
           </p:cNvPicPr>
@@ -19861,7 +19861,7 @@
       </p:sp>
       <p:pic>
         <p:nvPicPr>
-          <p:cNvPr id="3" name="Image 0" descr="preencoded.png">    </p:cNvPr>
+          <p:cNvPr id="3" name="Image 0" descr="preencoded.png"/>
           <p:cNvPicPr>
             <a:picLocks noChangeAspect="1"/>
           </p:cNvPicPr>
@@ -20047,7 +20047,7 @@
       </p:sp>
       <p:pic>
         <p:nvPicPr>
-          <p:cNvPr id="9" name="Image 1" descr="preencoded.png">    </p:cNvPr>
+          <p:cNvPr id="9" name="Image 1" descr="preencoded.png"/>
           <p:cNvPicPr>
             <a:picLocks noChangeAspect="1"/>
           </p:cNvPicPr>
@@ -20259,7 +20259,7 @@
       </p:sp>
       <p:pic>
         <p:nvPicPr>
-          <p:cNvPr id="14" name="Image 2" descr="preencoded.png">    </p:cNvPr>
+          <p:cNvPr id="14" name="Image 2" descr="preencoded.png"/>
           <p:cNvPicPr>
             <a:picLocks noChangeAspect="1"/>
           </p:cNvPicPr>
@@ -20561,7 +20561,7 @@
       </p:sp>
       <p:pic>
         <p:nvPicPr>
-          <p:cNvPr id="3" name="Image 0" descr="preencoded.png">    </p:cNvPr>
+          <p:cNvPr id="3" name="Image 0" descr="preencoded.png"/>
           <p:cNvPicPr>
             <a:picLocks noChangeAspect="1"/>
           </p:cNvPicPr>
@@ -20938,7 +20938,7 @@
       </p:sp>
       <p:pic>
         <p:nvPicPr>
-          <p:cNvPr id="12" name="Image 1" descr="preencoded.png">    </p:cNvPr>
+          <p:cNvPr id="12" name="Image 1" descr="preencoded.png"/>
           <p:cNvPicPr>
             <a:picLocks noChangeAspect="1"/>
           </p:cNvPicPr>
@@ -21389,7 +21389,7 @@
       </p:sp>
       <p:pic>
         <p:nvPicPr>
-          <p:cNvPr id="5" name="Image 0" descr="preencoded.png">    </p:cNvPr>
+          <p:cNvPr id="5" name="Image 0" descr="preencoded.png"/>
           <p:cNvPicPr>
             <a:picLocks noChangeAspect="1"/>
           </p:cNvPicPr>
@@ -21710,7 +21710,7 @@
       </p:sp>
       <p:pic>
         <p:nvPicPr>
-          <p:cNvPr id="3" name="Image 0" descr="preencoded.png">    </p:cNvPr>
+          <p:cNvPr id="3" name="Image 0" descr="preencoded.png"/>
           <p:cNvPicPr>
             <a:picLocks noChangeAspect="1"/>
           </p:cNvPicPr>
@@ -21896,7 +21896,7 @@
       </p:sp>
       <p:pic>
         <p:nvPicPr>
-          <p:cNvPr id="9" name="Image 1" descr="preencoded.png">    </p:cNvPr>
+          <p:cNvPr id="9" name="Image 1" descr="preencoded.png"/>
           <p:cNvPicPr>
             <a:picLocks noChangeAspect="1"/>
           </p:cNvPicPr>
@@ -22062,7 +22062,7 @@
       </p:sp>
       <p:pic>
         <p:nvPicPr>
-          <p:cNvPr id="14" name="Image 2" descr="preencoded.png">    </p:cNvPr>
+          <p:cNvPr id="14" name="Image 2" descr="preencoded.png"/>
           <p:cNvPicPr>
             <a:picLocks noChangeAspect="1"/>
           </p:cNvPicPr>
@@ -22228,7 +22228,7 @@
       </p:sp>
       <p:pic>
         <p:nvPicPr>
-          <p:cNvPr id="19" name="Image 3" descr="preencoded.png">    </p:cNvPr>
+          <p:cNvPr id="19" name="Image 3" descr="preencoded.png"/>
           <p:cNvPicPr>
             <a:picLocks noChangeAspect="1"/>
           </p:cNvPicPr>
@@ -22543,7 +22543,7 @@
       </p:sp>
       <p:pic>
         <p:nvPicPr>
-          <p:cNvPr id="3" name="Image 0" descr="preencoded.png">    </p:cNvPr>
+          <p:cNvPr id="3" name="Image 0" descr="preencoded.png"/>
           <p:cNvPicPr>
             <a:picLocks noChangeAspect="1"/>
           </p:cNvPicPr>
@@ -22920,7 +22920,7 @@
       </p:sp>
       <p:pic>
         <p:nvPicPr>
-          <p:cNvPr id="12" name="Image 1" descr="preencoded.png">    </p:cNvPr>
+          <p:cNvPr id="12" name="Image 1" descr="preencoded.png"/>
           <p:cNvPicPr>
             <a:picLocks noChangeAspect="1"/>
           </p:cNvPicPr>
@@ -23371,7 +23371,7 @@
       </p:sp>
       <p:pic>
         <p:nvPicPr>
-          <p:cNvPr id="5" name="Image 0" descr="preencoded.png">    </p:cNvPr>
+          <p:cNvPr id="5" name="Image 0" descr="preencoded.png"/>
           <p:cNvPicPr>
             <a:picLocks noChangeAspect="1"/>
           </p:cNvPicPr>
@@ -23692,7 +23692,7 @@
       </p:sp>
       <p:pic>
         <p:nvPicPr>
-          <p:cNvPr id="3" name="Image 0" descr="preencoded.png">    </p:cNvPr>
+          <p:cNvPr id="3" name="Image 0" descr="preencoded.png"/>
           <p:cNvPicPr>
             <a:picLocks noChangeAspect="1"/>
           </p:cNvPicPr>
@@ -23878,7 +23878,7 @@
       </p:sp>
       <p:pic>
         <p:nvPicPr>
-          <p:cNvPr id="9" name="Image 1" descr="preencoded.png">    </p:cNvPr>
+          <p:cNvPr id="9" name="Image 1" descr="preencoded.png"/>
           <p:cNvPicPr>
             <a:picLocks noChangeAspect="1"/>
           </p:cNvPicPr>
@@ -24044,7 +24044,7 @@
       </p:sp>
       <p:pic>
         <p:nvPicPr>
-          <p:cNvPr id="14" name="Image 2" descr="preencoded.png">    </p:cNvPr>
+          <p:cNvPr id="14" name="Image 2" descr="preencoded.png"/>
           <p:cNvPicPr>
             <a:picLocks noChangeAspect="1"/>
           </p:cNvPicPr>
@@ -24210,7 +24210,7 @@
       </p:sp>
       <p:pic>
         <p:nvPicPr>
-          <p:cNvPr id="19" name="Image 3" descr="preencoded.png">    </p:cNvPr>
+          <p:cNvPr id="19" name="Image 3" descr="preencoded.png"/>
           <p:cNvPicPr>
             <a:picLocks noChangeAspect="1"/>
           </p:cNvPicPr>
@@ -24525,7 +24525,7 @@
       </p:sp>
       <p:pic>
         <p:nvPicPr>
-          <p:cNvPr id="3" name="Image 0" descr="preencoded.png">    </p:cNvPr>
+          <p:cNvPr id="3" name="Image 0" descr="preencoded.png"/>
           <p:cNvPicPr>
             <a:picLocks noChangeAspect="1"/>
           </p:cNvPicPr>
@@ -24902,7 +24902,7 @@
       </p:sp>
       <p:pic>
         <p:nvPicPr>
-          <p:cNvPr id="12" name="Image 1" descr="preencoded.png">    </p:cNvPr>
+          <p:cNvPr id="12" name="Image 1" descr="preencoded.png"/>
           <p:cNvPicPr>
             <a:picLocks noChangeAspect="1"/>
           </p:cNvPicPr>
@@ -25353,7 +25353,7 @@
       </p:sp>
       <p:pic>
         <p:nvPicPr>
-          <p:cNvPr id="5" name="Image 0" descr="preencoded.png">    </p:cNvPr>
+          <p:cNvPr id="5" name="Image 0" descr="preencoded.png"/>
           <p:cNvPicPr>
             <a:picLocks noChangeAspect="1"/>
           </p:cNvPicPr>
@@ -25674,7 +25674,7 @@
       </p:sp>
       <p:pic>
         <p:nvPicPr>
-          <p:cNvPr id="3" name="Image 0" descr="preencoded.png">    </p:cNvPr>
+          <p:cNvPr id="3" name="Image 0" descr="preencoded.png"/>
           <p:cNvPicPr>
             <a:picLocks noChangeAspect="1"/>
           </p:cNvPicPr>
@@ -25860,7 +25860,7 @@
       </p:sp>
       <p:pic>
         <p:nvPicPr>
-          <p:cNvPr id="9" name="Image 1" descr="preencoded.png">    </p:cNvPr>
+          <p:cNvPr id="9" name="Image 1" descr="preencoded.png"/>
           <p:cNvPicPr>
             <a:picLocks noChangeAspect="1"/>
           </p:cNvPicPr>
@@ -26026,7 +26026,7 @@
       </p:sp>
       <p:pic>
         <p:nvPicPr>
-          <p:cNvPr id="14" name="Image 2" descr="preencoded.png">    </p:cNvPr>
+          <p:cNvPr id="14" name="Image 2" descr="preencoded.png"/>
           <p:cNvPicPr>
             <a:picLocks noChangeAspect="1"/>
           </p:cNvPicPr>
@@ -26192,7 +26192,7 @@
       </p:sp>
       <p:pic>
         <p:nvPicPr>
-          <p:cNvPr id="19" name="Image 3" descr="preencoded.png">    </p:cNvPr>
+          <p:cNvPr id="19" name="Image 3" descr="preencoded.png"/>
           <p:cNvPicPr>
             <a:picLocks noChangeAspect="1"/>
           </p:cNvPicPr>
@@ -26507,7 +26507,7 @@
       </p:sp>
       <p:pic>
         <p:nvPicPr>
-          <p:cNvPr id="3" name="Image 0" descr="preencoded.png">    </p:cNvPr>
+          <p:cNvPr id="3" name="Image 0" descr="preencoded.png"/>
           <p:cNvPicPr>
             <a:picLocks noChangeAspect="1"/>
           </p:cNvPicPr>
@@ -26884,7 +26884,7 @@
       </p:sp>
       <p:pic>
         <p:nvPicPr>
-          <p:cNvPr id="12" name="Image 1" descr="preencoded.png">    </p:cNvPr>
+          <p:cNvPr id="12" name="Image 1" descr="preencoded.png"/>
           <p:cNvPicPr>
             <a:picLocks noChangeAspect="1"/>
           </p:cNvPicPr>
@@ -27295,7 +27295,7 @@
       </p:sp>
       <p:pic>
         <p:nvPicPr>
-          <p:cNvPr id="3" name="Image 0" descr="preencoded.png">    </p:cNvPr>
+          <p:cNvPr id="3" name="Image 0" descr="preencoded.png"/>
           <p:cNvPicPr>
             <a:picLocks noChangeAspect="1"/>
           </p:cNvPicPr>
@@ -28259,7 +28259,7 @@
       </p:sp>
       <p:pic>
         <p:nvPicPr>
-          <p:cNvPr id="5" name="Image 0" descr="preencoded.png">    </p:cNvPr>
+          <p:cNvPr id="5" name="Image 0" descr="preencoded.png"/>
           <p:cNvPicPr>
             <a:picLocks noChangeAspect="1"/>
           </p:cNvPicPr>
@@ -28580,7 +28580,7 @@
       </p:sp>
       <p:pic>
         <p:nvPicPr>
-          <p:cNvPr id="3" name="Image 0" descr="preencoded.png">    </p:cNvPr>
+          <p:cNvPr id="3" name="Image 0" descr="preencoded.png"/>
           <p:cNvPicPr>
             <a:picLocks noChangeAspect="1"/>
           </p:cNvPicPr>
@@ -28766,7 +28766,7 @@
       </p:sp>
       <p:pic>
         <p:nvPicPr>
-          <p:cNvPr id="9" name="Image 1" descr="preencoded.png">    </p:cNvPr>
+          <p:cNvPr id="9" name="Image 1" descr="preencoded.png"/>
           <p:cNvPicPr>
             <a:picLocks noChangeAspect="1"/>
           </p:cNvPicPr>
@@ -28932,7 +28932,7 @@
       </p:sp>
       <p:pic>
         <p:nvPicPr>
-          <p:cNvPr id="14" name="Image 2" descr="preencoded.png">    </p:cNvPr>
+          <p:cNvPr id="14" name="Image 2" descr="preencoded.png"/>
           <p:cNvPicPr>
             <a:picLocks noChangeAspect="1"/>
           </p:cNvPicPr>
@@ -29098,7 +29098,7 @@
       </p:sp>
       <p:pic>
         <p:nvPicPr>
-          <p:cNvPr id="19" name="Image 3" descr="preencoded.png">    </p:cNvPr>
+          <p:cNvPr id="19" name="Image 3" descr="preencoded.png"/>
           <p:cNvPicPr>
             <a:picLocks noChangeAspect="1"/>
           </p:cNvPicPr>
@@ -29413,7 +29413,7 @@
       </p:sp>
       <p:pic>
         <p:nvPicPr>
-          <p:cNvPr id="3" name="Image 0" descr="preencoded.png">    </p:cNvPr>
+          <p:cNvPr id="3" name="Image 0" descr="preencoded.png"/>
           <p:cNvPicPr>
             <a:picLocks noChangeAspect="1"/>
           </p:cNvPicPr>
@@ -29790,7 +29790,7 @@
       </p:sp>
       <p:pic>
         <p:nvPicPr>
-          <p:cNvPr id="12" name="Image 1" descr="preencoded.png">    </p:cNvPr>
+          <p:cNvPr id="12" name="Image 1" descr="preencoded.png"/>
           <p:cNvPicPr>
             <a:picLocks noChangeAspect="1"/>
           </p:cNvPicPr>
@@ -30241,7 +30241,7 @@
       </p:sp>
       <p:pic>
         <p:nvPicPr>
-          <p:cNvPr id="5" name="Image 0" descr="preencoded.png">    </p:cNvPr>
+          <p:cNvPr id="5" name="Image 0" descr="preencoded.png"/>
           <p:cNvPicPr>
             <a:picLocks noChangeAspect="1"/>
           </p:cNvPicPr>
@@ -30562,7 +30562,7 @@
       </p:sp>
       <p:pic>
         <p:nvPicPr>
-          <p:cNvPr id="3" name="Image 0" descr="preencoded.png">    </p:cNvPr>
+          <p:cNvPr id="3" name="Image 0" descr="preencoded.png"/>
           <p:cNvPicPr>
             <a:picLocks noChangeAspect="1"/>
           </p:cNvPicPr>
@@ -30748,7 +30748,7 @@
       </p:sp>
       <p:pic>
         <p:nvPicPr>
-          <p:cNvPr id="9" name="Image 1" descr="preencoded.png">    </p:cNvPr>
+          <p:cNvPr id="9" name="Image 1" descr="preencoded.png"/>
           <p:cNvPicPr>
             <a:picLocks noChangeAspect="1"/>
           </p:cNvPicPr>
@@ -30914,7 +30914,7 @@
       </p:sp>
       <p:pic>
         <p:nvPicPr>
-          <p:cNvPr id="14" name="Image 2" descr="preencoded.png">    </p:cNvPr>
+          <p:cNvPr id="14" name="Image 2" descr="preencoded.png"/>
           <p:cNvPicPr>
             <a:picLocks noChangeAspect="1"/>
           </p:cNvPicPr>
@@ -31080,7 +31080,7 @@
       </p:sp>
       <p:pic>
         <p:nvPicPr>
-          <p:cNvPr id="19" name="Image 3" descr="preencoded.png">    </p:cNvPr>
+          <p:cNvPr id="19" name="Image 3" descr="preencoded.png"/>
           <p:cNvPicPr>
             <a:picLocks noChangeAspect="1"/>
           </p:cNvPicPr>
@@ -31395,7 +31395,7 @@
       </p:sp>
       <p:pic>
         <p:nvPicPr>
-          <p:cNvPr id="3" name="Image 0" descr="preencoded.png">    </p:cNvPr>
+          <p:cNvPr id="3" name="Image 0" descr="preencoded.png"/>
           <p:cNvPicPr>
             <a:picLocks noChangeAspect="1"/>
           </p:cNvPicPr>
@@ -31772,7 +31772,7 @@
       </p:sp>
       <p:pic>
         <p:nvPicPr>
-          <p:cNvPr id="12" name="Image 1" descr="preencoded.png">    </p:cNvPr>
+          <p:cNvPr id="12" name="Image 1" descr="preencoded.png"/>
           <p:cNvPicPr>
             <a:picLocks noChangeAspect="1"/>
           </p:cNvPicPr>
@@ -32223,7 +32223,7 @@
       </p:sp>
       <p:pic>
         <p:nvPicPr>
-          <p:cNvPr id="5" name="Image 0" descr="preencoded.png">    </p:cNvPr>
+          <p:cNvPr id="5" name="Image 0" descr="preencoded.png"/>
           <p:cNvPicPr>
             <a:picLocks noChangeAspect="1"/>
           </p:cNvPicPr>
@@ -32544,7 +32544,7 @@
       </p:sp>
       <p:pic>
         <p:nvPicPr>
-          <p:cNvPr id="3" name="Image 0" descr="preencoded.png">    </p:cNvPr>
+          <p:cNvPr id="3" name="Image 0" descr="preencoded.png"/>
           <p:cNvPicPr>
             <a:picLocks noChangeAspect="1"/>
           </p:cNvPicPr>
@@ -32730,7 +32730,7 @@
       </p:sp>
       <p:pic>
         <p:nvPicPr>
-          <p:cNvPr id="9" name="Image 1" descr="preencoded.png">    </p:cNvPr>
+          <p:cNvPr id="9" name="Image 1" descr="preencoded.png"/>
           <p:cNvPicPr>
             <a:picLocks noChangeAspect="1"/>
           </p:cNvPicPr>
@@ -32896,7 +32896,7 @@
       </p:sp>
       <p:pic>
         <p:nvPicPr>
-          <p:cNvPr id="14" name="Image 2" descr="preencoded.png">    </p:cNvPr>
+          <p:cNvPr id="14" name="Image 2" descr="preencoded.png"/>
           <p:cNvPicPr>
             <a:picLocks noChangeAspect="1"/>
           </p:cNvPicPr>
@@ -33062,7 +33062,7 @@
       </p:sp>
       <p:pic>
         <p:nvPicPr>
-          <p:cNvPr id="19" name="Image 3" descr="preencoded.png">    </p:cNvPr>
+          <p:cNvPr id="19" name="Image 3" descr="preencoded.png"/>
           <p:cNvPicPr>
             <a:picLocks noChangeAspect="1"/>
           </p:cNvPicPr>
@@ -33377,7 +33377,7 @@
       </p:sp>
       <p:pic>
         <p:nvPicPr>
-          <p:cNvPr id="3" name="Image 0" descr="preencoded.png">    </p:cNvPr>
+          <p:cNvPr id="3" name="Image 0" descr="preencoded.png"/>
           <p:cNvPicPr>
             <a:picLocks noChangeAspect="1"/>
           </p:cNvPicPr>
@@ -33754,7 +33754,7 @@
       </p:sp>
       <p:pic>
         <p:nvPicPr>
-          <p:cNvPr id="12" name="Image 1" descr="preencoded.png">    </p:cNvPr>
+          <p:cNvPr id="12" name="Image 1" descr="preencoded.png"/>
           <p:cNvPicPr>
             <a:picLocks noChangeAspect="1"/>
           </p:cNvPicPr>
@@ -34205,7 +34205,7 @@
       </p:sp>
       <p:pic>
         <p:nvPicPr>
-          <p:cNvPr id="5" name="Image 0" descr="preencoded.png">    </p:cNvPr>
+          <p:cNvPr id="5" name="Image 0" descr="preencoded.png"/>
           <p:cNvPicPr>
             <a:picLocks noChangeAspect="1"/>
           </p:cNvPicPr>
@@ -34526,7 +34526,7 @@
       </p:sp>
       <p:pic>
         <p:nvPicPr>
-          <p:cNvPr id="3" name="Image 0" descr="preencoded.png">    </p:cNvPr>
+          <p:cNvPr id="3" name="Image 0" descr="preencoded.png"/>
           <p:cNvPicPr>
             <a:picLocks noChangeAspect="1"/>
           </p:cNvPicPr>
@@ -36866,7 +36866,7 @@
       </p:sp>
       <p:pic>
         <p:nvPicPr>
-          <p:cNvPr id="3" name="Image 0" descr="preencoded.png">    </p:cNvPr>
+          <p:cNvPr id="3" name="Image 0" descr="preencoded.png"/>
           <p:cNvPicPr>
             <a:picLocks noChangeAspect="1"/>
           </p:cNvPicPr>
@@ -37052,7 +37052,7 @@
       </p:sp>
       <p:pic>
         <p:nvPicPr>
-          <p:cNvPr id="9" name="Image 1" descr="preencoded.png">    </p:cNvPr>
+          <p:cNvPr id="9" name="Image 1" descr="preencoded.png"/>
           <p:cNvPicPr>
             <a:picLocks noChangeAspect="1"/>
           </p:cNvPicPr>
@@ -37218,7 +37218,7 @@
       </p:sp>
       <p:pic>
         <p:nvPicPr>
-          <p:cNvPr id="14" name="Image 2" descr="preencoded.png">    </p:cNvPr>
+          <p:cNvPr id="14" name="Image 2" descr="preencoded.png"/>
           <p:cNvPicPr>
             <a:picLocks noChangeAspect="1"/>
           </p:cNvPicPr>
@@ -37384,7 +37384,7 @@
       </p:sp>
       <p:pic>
         <p:nvPicPr>
-          <p:cNvPr id="19" name="Image 3" descr="preencoded.png">    </p:cNvPr>
+          <p:cNvPr id="19" name="Image 3" descr="preencoded.png"/>
           <p:cNvPicPr>
             <a:picLocks noChangeAspect="1"/>
           </p:cNvPicPr>
@@ -37699,7 +37699,7 @@
       </p:sp>
       <p:pic>
         <p:nvPicPr>
-          <p:cNvPr id="3" name="Image 0" descr="preencoded.png">    </p:cNvPr>
+          <p:cNvPr id="3" name="Image 0" descr="preencoded.png"/>
           <p:cNvPicPr>
             <a:picLocks noChangeAspect="1"/>
           </p:cNvPicPr>
@@ -38076,7 +38076,7 @@
       </p:sp>
       <p:pic>
         <p:nvPicPr>
-          <p:cNvPr id="12" name="Image 1" descr="preencoded.png">    </p:cNvPr>
+          <p:cNvPr id="12" name="Image 1" descr="preencoded.png"/>
           <p:cNvPicPr>
             <a:picLocks noChangeAspect="1"/>
           </p:cNvPicPr>
@@ -38527,7 +38527,7 @@
       </p:sp>
       <p:pic>
         <p:nvPicPr>
-          <p:cNvPr id="5" name="Image 0" descr="preencoded.png">    </p:cNvPr>
+          <p:cNvPr id="5" name="Image 0" descr="preencoded.png"/>
           <p:cNvPicPr>
             <a:picLocks noChangeAspect="1"/>
           </p:cNvPicPr>
@@ -38690,7 +38690,7 @@
       </p:sp>
       <p:pic>
         <p:nvPicPr>
-          <p:cNvPr id="10" name="Image 1" descr="preencoded.png">    </p:cNvPr>
+          <p:cNvPr id="10" name="Image 1" descr="preencoded.png"/>
           <p:cNvPicPr>
             <a:picLocks noChangeAspect="1"/>
           </p:cNvPicPr>
@@ -38856,7 +38856,7 @@
       </p:sp>
       <p:pic>
         <p:nvPicPr>
-          <p:cNvPr id="15" name="Image 2" descr="preencoded.png">    </p:cNvPr>
+          <p:cNvPr id="15" name="Image 2" descr="preencoded.png"/>
           <p:cNvPicPr>
             <a:picLocks noChangeAspect="1"/>
           </p:cNvPicPr>
@@ -39022,7 +39022,7 @@
       </p:sp>
       <p:pic>
         <p:nvPicPr>
-          <p:cNvPr id="20" name="Image 3" descr="preencoded.png">    </p:cNvPr>
+          <p:cNvPr id="20" name="Image 3" descr="preencoded.png"/>
           <p:cNvPicPr>
             <a:picLocks noChangeAspect="1"/>
           </p:cNvPicPr>
@@ -39356,7 +39356,7 @@
       </p:sp>
       <p:pic>
         <p:nvPicPr>
-          <p:cNvPr id="3" name="Image 0" descr="preencoded.png">    </p:cNvPr>
+          <p:cNvPr id="3" name="Image 0" descr="preencoded.png"/>
           <p:cNvPicPr>
             <a:picLocks noChangeAspect="1"/>
           </p:cNvPicPr>
@@ -40990,7 +40990,7 @@
       </p:sp>
       <p:pic>
         <p:nvPicPr>
-          <p:cNvPr id="5" name="Image 0" descr="preencoded.png">    </p:cNvPr>
+          <p:cNvPr id="5" name="Image 0" descr="preencoded.png"/>
           <p:cNvPicPr>
             <a:picLocks noChangeAspect="1"/>
           </p:cNvPicPr>
@@ -41311,7 +41311,7 @@
       </p:sp>
       <p:pic>
         <p:nvPicPr>
-          <p:cNvPr id="3" name="Image 0" descr="preencoded.png">    </p:cNvPr>
+          <p:cNvPr id="3" name="Image 0" descr="preencoded.png"/>
           <p:cNvPicPr>
             <a:picLocks noChangeAspect="1"/>
           </p:cNvPicPr>
@@ -41497,7 +41497,7 @@
       </p:sp>
       <p:pic>
         <p:nvPicPr>
-          <p:cNvPr id="9" name="Image 1" descr="preencoded.png">    </p:cNvPr>
+          <p:cNvPr id="9" name="Image 1" descr="preencoded.png"/>
           <p:cNvPicPr>
             <a:picLocks noChangeAspect="1"/>
           </p:cNvPicPr>
@@ -41663,7 +41663,7 @@
       </p:sp>
       <p:pic>
         <p:nvPicPr>
-          <p:cNvPr id="14" name="Image 2" descr="preencoded.png">    </p:cNvPr>
+          <p:cNvPr id="14" name="Image 2" descr="preencoded.png"/>
           <p:cNvPicPr>
             <a:picLocks noChangeAspect="1"/>
           </p:cNvPicPr>
@@ -41829,7 +41829,7 @@
       </p:sp>
       <p:pic>
         <p:nvPicPr>
-          <p:cNvPr id="19" name="Image 3" descr="preencoded.png">    </p:cNvPr>
+          <p:cNvPr id="19" name="Image 3" descr="preencoded.png"/>
           <p:cNvPicPr>
             <a:picLocks noChangeAspect="1"/>
           </p:cNvPicPr>
@@ -42144,7 +42144,7 @@
       </p:sp>
       <p:pic>
         <p:nvPicPr>
-          <p:cNvPr id="3" name="Image 0" descr="preencoded.png">    </p:cNvPr>
+          <p:cNvPr id="3" name="Image 0" descr="preencoded.png"/>
           <p:cNvPicPr>
             <a:picLocks noChangeAspect="1"/>
           </p:cNvPicPr>
@@ -42521,7 +42521,7 @@
       </p:sp>
       <p:pic>
         <p:nvPicPr>
-          <p:cNvPr id="12" name="Image 1" descr="preencoded.png">    </p:cNvPr>
+          <p:cNvPr id="12" name="Image 1" descr="preencoded.png"/>
           <p:cNvPicPr>
             <a:picLocks noChangeAspect="1"/>
           </p:cNvPicPr>
